--- a/tetris_presentation.pptx
+++ b/tetris_presentation.pptx
@@ -1828,7 +1828,7 @@
         </p:nvSpPr>
         <p:spPr>
           <a:xfrm>
-            <a:off x="7315200" y="3493008"/>
+            <a:off x="7315200" y="3639312"/>
             <a:ext cx="164592" cy="164592"/>
           </a:xfrm>
           <a:prstGeom prst="roundRect">
@@ -1850,7 +1850,7 @@
         </p:nvSpPr>
         <p:spPr>
           <a:xfrm>
-            <a:off x="7635240" y="3374136"/>
+            <a:off x="7635240" y="3520440"/>
             <a:ext cx="3977640" cy="502920"/>
           </a:xfrm>
           <a:prstGeom prst="rect">
@@ -1903,7 +1903,7 @@
         </p:nvSpPr>
         <p:spPr>
           <a:xfrm>
-            <a:off x="7315200" y="4151376"/>
+            <a:off x="7315200" y="4443984"/>
             <a:ext cx="164592" cy="164592"/>
           </a:xfrm>
           <a:prstGeom prst="roundRect">
@@ -1925,7 +1925,7 @@
         </p:nvSpPr>
         <p:spPr>
           <a:xfrm>
-            <a:off x="7635240" y="4032504"/>
+            <a:off x="7635240" y="4325112"/>
             <a:ext cx="3977640" cy="502920"/>
           </a:xfrm>
           <a:prstGeom prst="rect">
@@ -1978,7 +1978,7 @@
         </p:nvSpPr>
         <p:spPr>
           <a:xfrm>
-            <a:off x="7315200" y="4809744"/>
+            <a:off x="7315200" y="5248656"/>
             <a:ext cx="164592" cy="164592"/>
           </a:xfrm>
           <a:prstGeom prst="roundRect">
@@ -2000,7 +2000,7 @@
         </p:nvSpPr>
         <p:spPr>
           <a:xfrm>
-            <a:off x="7635240" y="4690872"/>
+            <a:off x="7635240" y="5129784"/>
             <a:ext cx="3977640" cy="502920"/>
           </a:xfrm>
           <a:prstGeom prst="rect">
@@ -2048,45 +2048,6 @@
       <p:sp>
         <p:nvSpPr>
           <p:cNvPr id="35" name="Text 33"/>
-          <p:cNvSpPr/>
-          <p:nvPr/>
-        </p:nvSpPr>
-        <p:spPr>
-          <a:xfrm>
-            <a:off x="7315200" y="5559552"/>
-            <a:ext cx="4297680" cy="548640"/>
-          </a:xfrm>
-          <a:prstGeom prst="rect">
-            <a:avLst/>
-          </a:prstGeom>
-          <a:noFill/>
-          <a:ln/>
-        </p:spPr>
-        <p:txBody>
-          <a:bodyPr wrap="square" lIns="0" tIns="0" rIns="0" bIns="0" rtlCol="0" anchor="ctr"/>
-          <a:lstStyle/>
-          <a:p>
-            <a:pPr indent="0" marL="0">
-              <a:buNone/>
-            </a:pPr>
-            <a:r>
-              <a:rPr lang="en-US" sz="1200" i="1" dirty="0">
-                <a:solidFill>
-                  <a:srgbClr val="CADCFC"/>
-                </a:solidFill>
-                <a:latin typeface="Calibri" pitchFamily="34" charset="0"/>
-                <a:ea typeface="Calibri" pitchFamily="34" charset="-122"/>
-                <a:cs typeface="Calibri" pitchFamily="34" charset="-120"/>
-              </a:rPr>
-              <a:t>Satisfies the project spec: at least one class, with real inheritance (Tetromino → GameObject).</a:t>
-            </a:r>
-            <a:endParaRPr lang="en-US" sz="1200" dirty="0"/>
-          </a:p>
-        </p:txBody>
-      </p:sp>
-      <p:sp>
-        <p:nvSpPr>
-          <p:cNvPr id="36" name="Text 34"/>
           <p:cNvSpPr/>
           <p:nvPr/>
         </p:nvSpPr>
@@ -3700,7 +3661,7 @@
                 <a:ea typeface="Cambria" pitchFamily="34" charset="-122"/>
                 <a:cs typeface="Cambria" pitchFamily="34" charset="-120"/>
               </a:rPr>
-              <a:t>Game Loop &amp; Live Demo</a:t>
+              <a:t>Game Loop &amp; Line Clearing</a:t>
             </a:r>
             <a:endParaRPr lang="en-US" sz="3000" dirty="0"/>
           </a:p>
@@ -4419,7 +4380,7 @@
             </a:avLst>
           </a:prstGeom>
           <a:solidFill>
-            <a:srgbClr val="00CC44"/>
+            <a:srgbClr val="141B45"/>
           </a:solidFill>
           <a:ln/>
         </p:spPr>
@@ -4457,7 +4418,7 @@
                 <a:ea typeface="Calibri" pitchFamily="34" charset="-122"/>
                 <a:cs typeface="Calibri" pitchFamily="34" charset="-120"/>
               </a:rPr>
-              <a:t>Live Demo</a:t>
+              <a:t>Clearing a Line</a:t>
             </a:r>
             <a:endParaRPr lang="en-US" sz="1500" dirty="0"/>
           </a:p>
@@ -4471,8 +4432,8 @@
         </p:nvSpPr>
         <p:spPr>
           <a:xfrm>
-            <a:off x="6309360" y="4937760"/>
-            <a:ext cx="4846320" cy="1143000"/>
+            <a:off x="6309360" y="4919472"/>
+            <a:ext cx="4846320" cy="1188720"/>
           </a:xfrm>
           <a:prstGeom prst="rect">
             <a:avLst/>
@@ -4481,24 +4442,58 @@
           <a:ln/>
         </p:spPr>
         <p:txBody>
-          <a:bodyPr wrap="square" lIns="0" tIns="0" rIns="0" bIns="0" rtlCol="0" anchor="ctr"/>
+          <a:bodyPr wrap="square" lIns="0" tIns="0" rIns="0" bIns="0" rtlCol="0" anchor="t"/>
           <a:lstStyle/>
           <a:p>
             <a:pPr indent="0" marL="0">
               <a:buNone/>
             </a:pPr>
             <a:r>
-              <a:rPr lang="en-US" sz="1300" dirty="0">
+              <a:rPr lang="en-US" sz="1250" dirty="0">
                 <a:solidFill>
-                  <a:srgbClr val="FFFFFF"/>
+                  <a:srgbClr val="00F0F0"/>
                 </a:solidFill>
-                <a:latin typeface="Calibri" pitchFamily="34" charset="0"/>
-                <a:ea typeface="Calibri" pitchFamily="34" charset="-122"/>
-                <a:cs typeface="Calibri" pitchFamily="34" charset="-120"/>
+                <a:latin typeface="Courier New" pitchFamily="34" charset="0"/>
+                <a:ea typeface="Courier New" pitchFamily="34" charset="-122"/>
+                <a:cs typeface="Courier New" pitchFamily="34" charset="-120"/>
               </a:rPr>
-              <a:t>Run tetris.py — move, rotate, clear a line, and trigger game over to show the full loop end-to-end.</a:t>
-            </a:r>
-            <a:endParaRPr lang="en-US" sz="1300" dirty="0"/>
+              <a:t>remaining = [row for row in grid</a:t>
+            </a:r>
+            <a:endParaRPr lang="en-US" sz="1250" dirty="0"/>
+          </a:p>
+          <a:p>
+            <a:pPr indent="0" marL="0">
+              <a:buNone/>
+            </a:pPr>
+            <a:r>
+              <a:rPr lang="en-US" sz="1250" dirty="0">
+                <a:solidFill>
+                  <a:srgbClr val="00F0F0"/>
+                </a:solidFill>
+                <a:latin typeface="Courier New" pitchFamily="34" charset="0"/>
+                <a:ea typeface="Courier New" pitchFamily="34" charset="-122"/>
+                <a:cs typeface="Courier New" pitchFamily="34" charset="-120"/>
+              </a:rPr>
+              <a:t>             if any(c is None for c in row)]</a:t>
+            </a:r>
+            <a:endParaRPr lang="en-US" sz="1250" dirty="0"/>
+          </a:p>
+          <a:p>
+            <a:pPr indent="0" marL="0">
+              <a:buNone/>
+            </a:pPr>
+            <a:r>
+              <a:rPr lang="en-US" sz="1250" dirty="0">
+                <a:solidFill>
+                  <a:srgbClr val="00F0F0"/>
+                </a:solidFill>
+                <a:latin typeface="Courier New" pitchFamily="34" charset="0"/>
+                <a:ea typeface="Courier New" pitchFamily="34" charset="-122"/>
+                <a:cs typeface="Courier New" pitchFamily="34" charset="-120"/>
+              </a:rPr>
+              <a:t>cleared = height - len(remaining)</a:t>
+            </a:r>
+            <a:endParaRPr lang="en-US" sz="1250" dirty="0"/>
           </a:p>
         </p:txBody>
       </p:sp>
